--- a/presentations/VEGO-AI-Iris-Supervisor-Decisions-2026-08-05.pptx
+++ b/presentations/VEGO-AI-Iris-Supervisor-Decisions-2026-08-05.pptx
@@ -162,7 +162,6 @@
               <a:ln>
                 <a:noFill/>
               </a:ln>
-              <a:effectLst/>
             </c:spPr>
             <c:dLblPos val="outEnd"/>
             <c:showLegendKey val="0"/>
@@ -230,7 +229,7 @@
               </c14:invertSolidFillFmt>
             </c:ext>
             <c:ext xmlns:c16="http://schemas.microsoft.com/office/drawing/2014/chart" uri="{C3380CC4-5D6E-409C-BE32-E72D297353CC}">
-              <c16:uniqueId val="{00000000-14C5-4F0B-AB1F-73382D234119}"/>
+              <c16:uniqueId val="{00000000-038C-4492-96FB-2B1A5476E53E}"/>
             </c:ext>
           </c:extLst>
         </c:ser>
@@ -288,7 +287,7 @@
         <c:auto val="1"/>
         <c:lblAlgn val="ctr"/>
         <c:lblOffset val="100"/>
-        <c:noMultiLvlLbl val="1"/>
+        <c:noMultiLvlLbl val="0"/>
       </c:catAx>
       <c:valAx>
         <c:axId val="48672768"/>
@@ -2331,31 +2330,15 @@
           <a:lstStyle/>
           <a:p>
             <a:r>
-              <a:t>4:30–5:15 — Request D-RQ-08 only if time permits.</a:t>
-            </a:r>
-          </a:p>
-          <a:p>
-            <a:r>
-              <a:t>Do not call the literature review or novelty case complete; the structure and seed tranche are the only narrow completions.</a:t>
-            </a:r>
-          </a:p>
-          <a:p>
+              <a:rPr lang="en-US"/>
+              <a:t>4:30–5:15 — Request D-RQ-08 only if time permits.
+Do not call the literature review or novelty case complete; the structure and seed tranche are the only narrow completions.
+5:15–6:15 — Reserved for supervisor clarification; if unused, continue immediately and preserve the time for the decision read-back.
+[Sources]
+- docs/research/phd-proposal/literature-review-protocol.md
+- docs/research/phd-proposal/master-traceability-register.md (R-15, R-16, A-02, A-03)</a:t>
+            </a:r>
             <a:endParaRPr/>
-          </a:p>
-          <a:p>
-            <a:r>
-              <a:t>[Sources]</a:t>
-            </a:r>
-          </a:p>
-          <a:p>
-            <a:r>
-              <a:t>- docs/research/phd-proposal/literature-review-protocol.md</a:t>
-            </a:r>
-          </a:p>
-          <a:p>
-            <a:r>
-              <a:t>- docs/research/phd-proposal/master-traceability-register.md (R-15, R-16, A-02, A-03)</a:t>
-            </a:r>
           </a:p>
         </p:txBody>
       </p:sp>
@@ -3362,7 +3345,7 @@
       </p:sp>
       <p:cxnSp>
         <p:nvCxnSpPr>
-          <p:cNvPr id="21" name="timeline-line"/>
+          <p:cNvPr id="24" name="timeline-line"/>
           <p:cNvCxnSpPr/>
           <p:nvPr/>
         </p:nvCxnSpPr>
@@ -3683,67 +3666,76 @@
         </p:spPr>
         <p:txBody>
           <a:bodyPr wrap="square" lIns="0" tIns="0" rIns="0" bIns="0" anchor="t">
-            <a:normAutofit/>
-          </a:bodyPr>
-          <a:lstStyle/>
-          <a:p>
-            <a:pPr algn="l">
-              <a:lnSpc>
-                <a:spcPct val="110000"/>
-              </a:lnSpc>
-              <a:spcAft>
-                <a:spcPts val="400"/>
-              </a:spcAft>
-              <a:buNone/>
-              <a:defRPr sz="1650">
-                <a:solidFill>
-                  <a:srgbClr val="000000"/>
-                </a:solidFill>
-                <a:latin typeface="Arial"/>
-                <a:ea typeface="Arial"/>
-                <a:cs typeface="Arial"/>
-              </a:defRPr>
-            </a:pPr>
-            <a:r>
-              <a:rPr sz="2100" b="1">
-                <a:solidFill>
-                  <a:srgbClr val="000000"/>
-                </a:solidFill>
-                <a:latin typeface="Arial"/>
-                <a:ea typeface="Arial"/>
-                <a:cs typeface="Arial"/>
-              </a:rPr>
-              <a:t>Medical go/no-go</a:t>
-            </a:r>
-          </a:p>
-          <a:p>
-            <a:pPr algn="l">
-              <a:lnSpc>
-                <a:spcPct val="110000"/>
-              </a:lnSpc>
-              <a:spcAft>
-                <a:spcPts val="0"/>
-              </a:spcAft>
-              <a:buNone/>
-              <a:defRPr sz="1650">
-                <a:solidFill>
-                  <a:srgbClr val="000000"/>
-                </a:solidFill>
-                <a:latin typeface="Arial"/>
-                <a:ea typeface="Arial"/>
-                <a:cs typeface="Arial"/>
-              </a:defRPr>
-            </a:pPr>
-            <a:r>
-              <a:rPr sz="1500" b="0">
-                <a:solidFill>
-                  <a:srgbClr val="5D6670"/>
-                </a:solidFill>
-                <a:latin typeface="Arial"/>
-                <a:ea typeface="Arial"/>
-                <a:cs typeface="Arial"/>
-              </a:rPr>
-              <a:t>6/6 permits consideration; 0–5/6 activates Plan B.</a:t>
+            <a:noAutofit/>
+          </a:bodyPr>
+          <a:lstStyle/>
+          <a:p>
+            <a:pPr algn="l">
+              <a:defRPr sz="1425" b="0" i="0">
+                <a:solidFill>
+                  <a:srgbClr val="000000"/>
+                </a:solidFill>
+                <a:latin typeface="Arial"/>
+                <a:ea typeface="Arial"/>
+                <a:cs typeface="Arial"/>
+              </a:defRPr>
+            </a:pPr>
+            <a:r>
+              <a:rPr sz="2200" b="1">
+                <a:solidFill>
+                  <a:srgbClr val="000000"/>
+                </a:solidFill>
+                <a:latin typeface="Arial"/>
+                <a:ea typeface="Arial"/>
+                <a:cs typeface="Arial"/>
+              </a:rPr>
+              <a:t>Medical route checkpoint</a:t>
+            </a:r>
+          </a:p>
+          <a:p>
+            <a:pPr algn="l">
+              <a:defRPr sz="1425" b="0" i="0">
+                <a:solidFill>
+                  <a:srgbClr val="000000"/>
+                </a:solidFill>
+                <a:latin typeface="Arial"/>
+                <a:ea typeface="Arial"/>
+                <a:cs typeface="Arial"/>
+              </a:defRPr>
+            </a:pPr>
+            <a:r>
+              <a:rPr sz="1650">
+                <a:solidFill>
+                  <a:srgbClr val="5F6B7A"/>
+                </a:solidFill>
+                <a:latin typeface="Arial"/>
+                <a:ea typeface="Arial"/>
+                <a:cs typeface="Arial"/>
+              </a:rPr>
+              <a:t>Any missing owner, evidence path, or feasible date activates Plan B.</a:t>
+            </a:r>
+          </a:p>
+          <a:p>
+            <a:pPr algn="l">
+              <a:defRPr sz="1425" b="0" i="0">
+                <a:solidFill>
+                  <a:srgbClr val="000000"/>
+                </a:solidFill>
+                <a:latin typeface="Arial"/>
+                <a:ea typeface="Arial"/>
+                <a:cs typeface="Arial"/>
+              </a:defRPr>
+            </a:pPr>
+            <a:r>
+              <a:rPr sz="1650">
+                <a:solidFill>
+                  <a:srgbClr val="5F6B7A"/>
+                </a:solidFill>
+                <a:latin typeface="Arial"/>
+                <a:ea typeface="Arial"/>
+                <a:cs typeface="Arial"/>
+              </a:rPr>
+              <a:t>Medical execution still requires all 6/6 gates to pass.</a:t>
             </a:r>
           </a:p>
         </p:txBody>
@@ -3927,6 +3919,41 @@
                 <a:cs typeface="Arial"/>
               </a:rPr>
               <a:t>Working targets only until Graduate Studies confirms policy and dates.</a:t>
+            </a:r>
+          </a:p>
+        </p:txBody>
+      </p:sp>
+      <p:sp>
+        <p:nvSpPr>
+          <p:cNvPr id="25" name="TextBox 24"/>
+          <p:cNvSpPr txBox="1"/>
+          <p:nvPr/>
+        </p:nvSpPr>
+        <p:spPr>
+          <a:xfrm>
+            <a:off x="400050" y="5810250"/>
+            <a:ext cx="11391900" cy="523875"/>
+          </a:xfrm>
+          <a:prstGeom prst="rect">
+            <a:avLst/>
+          </a:prstGeom>
+          <a:noFill/>
+        </p:spPr>
+        <p:txBody>
+          <a:bodyPr wrap="square" anchor="t" lIns="0" rIns="0" tIns="0" bIns="0">
+            <a:spAutoFit/>
+          </a:bodyPr>
+          <a:lstStyle/>
+          <a:p>
+            <a:pPr algn="l"/>
+            <a:r>
+              <a:rPr sz="1275" b="0">
+                <a:solidFill>
+                  <a:srgbClr val="5D6670"/>
+                </a:solidFill>
+                <a:latin typeface="Arial"/>
+              </a:rPr>
+              <a:t>Doctoral adequacy (R-04): novelty — Preliminary  ·  scale &amp; feasibility — Partial  ·  resources — Partial  ·  schedule — shown above.</a:t>
             </a:r>
           </a:p>
         </p:txBody>
@@ -4076,22 +4103,30 @@
               </a:defRPr>
             </a:pPr>
             <a:r>
-              <a:rPr sz="1500" b="0">
+              <a:rPr lang="en-US" sz="1500" b="0">
                 <a:solidFill>
                   <a:srgbClr val="5D6670"/>
                 </a:solidFill>
-                <a:latin typeface="Arial"/>
-                <a:ea typeface="Arial"/>
-                <a:cs typeface="Arial"/>
-              </a:rPr>
-              <a:t>Allowed outcomes: Approve · Approve with correction · Defer · Reject. Silence is Defer.</a:t>
-            </a:r>
+                <a:latin typeface="Arial" panose="020B0604020202020204" pitchFamily="34" charset="0"/>
+                <a:ea typeface="Arial"/>
+                <a:cs typeface="Arial"/>
+              </a:rPr>
+              <a:t>Allowed outcomes: Confirm · Confirm with correction · Retire or supersede · Defer. Silence is Defer.</a:t>
+            </a:r>
+            <a:endParaRPr sz="1500" b="0">
+              <a:solidFill>
+                <a:srgbClr val="5D6670"/>
+              </a:solidFill>
+              <a:latin typeface="Arial" panose="020B0604020202020204" pitchFamily="34" charset="0"/>
+              <a:ea typeface="Arial"/>
+              <a:cs typeface="Arial"/>
+            </a:endParaRPr>
           </a:p>
         </p:txBody>
       </p:sp>
       <p:graphicFrame>
         <p:nvGraphicFramePr>
-          <p:cNvPr id="10" name="evidence-table"/>
+          <p:cNvPr id="11" name="evidence-table"/>
           <p:cNvGraphicFramePr/>
           <p:nvPr/>
         </p:nvGraphicFramePr>
@@ -4474,6 +4509,7 @@
           <a:lstStyle/>
           <a:p>
             <a:pPr algn="r">
+              <a:buNone/>
               <a:defRPr sz="900" b="0" i="0">
                 <a:solidFill>
                   <a:srgbClr val="5F6B7A"/>
@@ -7159,7 +7195,7 @@
                 <a:ea typeface="Arial"/>
                 <a:cs typeface="Arial"/>
               </a:rPr>
-              <a:t>5,10</a:t>
+              <a:t>10</a:t>
             </a:r>
           </a:p>
         </p:txBody>
@@ -11336,10 +11372,10 @@
       </p:sp>
       <p:sp>
         <p:nvSpPr>
-          <p:cNvPr id="60" name="appendix-title">
-            <a:extLst>
-              <a:ext uri="{FF2B5EF4-FFF2-40B4-BE49-F238E27FC236}">
-                <a16:creationId xmlns:a16="http://schemas.microsoft.com/office/drawing/2014/main" id="{8EC4BCDE-33A9-46DC-9A22-A087418002AE}"/>
+          <p:cNvPr id="62" name="appendix-title">
+            <a:extLst>
+              <a:ext uri="{FF2B5EF4-FFF2-40B4-BE49-F238E27FC236}">
+                <a16:creationId xmlns:a16="http://schemas.microsoft.com/office/drawing/2014/main" id="{6E1AE52E-F1D6-5337-2127-21E2DD0B052E}"/>
               </a:ext>
             </a:extLst>
           </p:cNvPr>
@@ -11351,47 +11387,37 @@
         <p:spPr>
           <a:xfrm>
             <a:off x="400050" y="266700"/>
-            <a:ext cx="11391900" cy="609600"/>
-          </a:xfrm>
-          <a:prstGeom prst="rect">
-            <a:avLst/>
-          </a:prstGeom>
-          <a:solidFill>
-            <a:srgbClr val="000000">
-              <a:alpha val="0"/>
-            </a:srgbClr>
-          </a:solidFill>
-          <a:ln w="0">
-            <a:solidFill>
-              <a:srgbClr val="000000">
-                <a:alpha val="0"/>
-              </a:srgbClr>
-            </a:solidFill>
-            <a:prstDash val="solid"/>
-          </a:ln>
+            <a:ext cx="11410950" cy="609600"/>
+          </a:xfrm>
+          <a:prstGeom prst="rect">
+            <a:avLst/>
+          </a:prstGeom>
         </p:spPr>
         <p:txBody>
           <a:bodyPr wrap="none" lIns="0" tIns="0" rIns="0" bIns="0" anchor="t">
-            <a:normAutofit/>
-          </a:bodyPr>
-          <a:lstStyle/>
-          <a:p>
-            <a:pPr>
-              <a:lnSpc>
-                <a:spcPct val="110000"/>
-              </a:lnSpc>
-              <a:buNone/>
-              <a:defRPr sz="2700" b="1" i="0">
-                <a:solidFill>
-                  <a:srgbClr val="000000"/>
-                </a:solidFill>
-                <a:latin typeface="Arial"/>
-                <a:ea typeface="Arial"/>
-                <a:cs typeface="Arial"/>
-              </a:defRPr>
-            </a:pPr>
-            <a:r>
-              <a:rPr lang="en-US" sz="2700" b="1" i="0">
+            <a:noAutofit/>
+          </a:bodyPr>
+          <a:lstStyle/>
+          <a:p>
+            <a:pPr algn="l">
+              <a:lnSpc>
+                <a:spcPct val="110000"/>
+              </a:lnSpc>
+              <a:spcAft>
+                <a:spcPts val="0"/>
+              </a:spcAft>
+              <a:buNone/>
+              <a:defRPr sz="2700">
+                <a:solidFill>
+                  <a:srgbClr val="000000"/>
+                </a:solidFill>
+                <a:latin typeface="Arial"/>
+                <a:ea typeface="Arial"/>
+                <a:cs typeface="Arial"/>
+              </a:defRPr>
+            </a:pPr>
+            <a:r>
+              <a:rPr lang="en-US" sz="2700" b="1">
                 <a:solidFill>
                   <a:srgbClr val="000000"/>
                 </a:solidFill>
@@ -11399,9 +11425,9 @@
                 <a:ea typeface="Arial"/>
                 <a:cs typeface="Arial"/>
               </a:rPr>
-              <a:t>Appendix · Requirements R-11–R-19</a:t>
-            </a:r>
-            <a:endParaRPr sz="2700" b="1" i="0">
+              <a:t>Requirements R-11–R-19 · evidence appendix</a:t>
+            </a:r>
+            <a:endParaRPr sz="2700" b="1">
               <a:solidFill>
                 <a:srgbClr val="000000"/>
               </a:solidFill>
@@ -13372,7 +13398,7 @@
                 <a:ea typeface="Arial"/>
                 <a:cs typeface="Arial"/>
               </a:rPr>
-              <a:t>7</a:t>
+              <a:t>2,7</a:t>
             </a:r>
           </a:p>
         </p:txBody>
@@ -13552,7 +13578,7 @@
                 <a:ea typeface="Arial"/>
                 <a:cs typeface="Arial"/>
               </a:rPr>
-              <a:t>10</a:t>
+              <a:t>2,10</a:t>
             </a:r>
           </a:p>
         </p:txBody>
@@ -16823,10 +16849,10 @@
       </p:sp>
       <p:sp>
         <p:nvSpPr>
-          <p:cNvPr id="50" name="appendix-title">
-            <a:extLst>
-              <a:ext uri="{FF2B5EF4-FFF2-40B4-BE49-F238E27FC236}">
-                <a16:creationId xmlns:a16="http://schemas.microsoft.com/office/drawing/2014/main" id="{B88230A1-5FCC-45FC-9E6A-0DC7C8D2B479}"/>
+          <p:cNvPr id="52" name="appendix-title">
+            <a:extLst>
+              <a:ext uri="{FF2B5EF4-FFF2-40B4-BE49-F238E27FC236}">
+                <a16:creationId xmlns:a16="http://schemas.microsoft.com/office/drawing/2014/main" id="{AEC2D1DA-3045-C100-57F4-B87736540D11}"/>
               </a:ext>
             </a:extLst>
           </p:cNvPr>
@@ -16838,47 +16864,37 @@
         <p:spPr>
           <a:xfrm>
             <a:off x="400050" y="266700"/>
-            <a:ext cx="11391900" cy="609600"/>
-          </a:xfrm>
-          <a:prstGeom prst="rect">
-            <a:avLst/>
-          </a:prstGeom>
-          <a:solidFill>
-            <a:srgbClr val="000000">
-              <a:alpha val="0"/>
-            </a:srgbClr>
-          </a:solidFill>
-          <a:ln w="0">
-            <a:solidFill>
-              <a:srgbClr val="000000">
-                <a:alpha val="0"/>
-              </a:srgbClr>
-            </a:solidFill>
-            <a:prstDash val="solid"/>
-          </a:ln>
+            <a:ext cx="11410950" cy="609600"/>
+          </a:xfrm>
+          <a:prstGeom prst="rect">
+            <a:avLst/>
+          </a:prstGeom>
         </p:spPr>
         <p:txBody>
           <a:bodyPr wrap="none" lIns="0" tIns="0" rIns="0" bIns="0" anchor="t">
-            <a:normAutofit/>
-          </a:bodyPr>
-          <a:lstStyle/>
-          <a:p>
-            <a:pPr>
-              <a:lnSpc>
-                <a:spcPct val="110000"/>
-              </a:lnSpc>
-              <a:buNone/>
-              <a:defRPr sz="2700" b="1" i="0">
-                <a:solidFill>
-                  <a:srgbClr val="000000"/>
-                </a:solidFill>
-                <a:latin typeface="Arial"/>
-                <a:ea typeface="Arial"/>
-                <a:cs typeface="Arial"/>
-              </a:defRPr>
-            </a:pPr>
-            <a:r>
-              <a:rPr lang="en-US" sz="2700" b="1" i="0">
+            <a:noAutofit/>
+          </a:bodyPr>
+          <a:lstStyle/>
+          <a:p>
+            <a:pPr algn="l">
+              <a:lnSpc>
+                <a:spcPct val="110000"/>
+              </a:lnSpc>
+              <a:spcAft>
+                <a:spcPts val="0"/>
+              </a:spcAft>
+              <a:buNone/>
+              <a:defRPr sz="2700">
+                <a:solidFill>
+                  <a:srgbClr val="000000"/>
+                </a:solidFill>
+                <a:latin typeface="Arial"/>
+                <a:ea typeface="Arial"/>
+                <a:cs typeface="Arial"/>
+              </a:defRPr>
+            </a:pPr>
+            <a:r>
+              <a:rPr lang="en-US" sz="2700" b="1">
                 <a:solidFill>
                   <a:srgbClr val="000000"/>
                 </a:solidFill>
@@ -16886,9 +16902,9 @@
                 <a:ea typeface="Arial"/>
                 <a:cs typeface="Arial"/>
               </a:rPr>
-              <a:t>Appendix · Actions A-09–A-15</a:t>
-            </a:r>
-            <a:endParaRPr sz="2700" b="1" i="0">
+              <a:t>Actions A-09–A-15 · evidence appendix</a:t>
+            </a:r>
+            <a:endParaRPr sz="2700" b="1">
               <a:solidFill>
                 <a:srgbClr val="000000"/>
               </a:solidFill>
@@ -21975,6 +21991,41 @@
           </a:ln>
         </p:spPr>
       </p:sp>
+      <p:sp>
+        <p:nvSpPr>
+          <p:cNvPr id="34" name="TextBox 33"/>
+          <p:cNvSpPr txBox="1"/>
+          <p:nvPr/>
+        </p:nvSpPr>
+        <p:spPr>
+          <a:xfrm>
+            <a:off x="400050" y="6000750"/>
+            <a:ext cx="11391900" cy="381000"/>
+          </a:xfrm>
+          <a:prstGeom prst="rect">
+            <a:avLst/>
+          </a:prstGeom>
+          <a:noFill/>
+        </p:spPr>
+        <p:txBody>
+          <a:bodyPr wrap="square" anchor="t" lIns="0" rIns="0" tIns="0" bIns="0">
+            <a:spAutoFit/>
+          </a:bodyPr>
+          <a:lstStyle/>
+          <a:p>
+            <a:pPr algn="l"/>
+            <a:r>
+              <a:rPr sz="975" b="0">
+                <a:solidFill>
+                  <a:srgbClr val="5D6670"/>
+                </a:solidFill>
+                <a:latin typeface="Arial"/>
+              </a:rPr>
+              <a:t>Control status used throughout the appendix tables and the Slide 8 bar chart — Verified · Awaiting · Partial · Open · Blocked — is a separate vocabulary from the Claim states above; see iris-requirements-closure-audit.md.</a:t>
+            </a:r>
+          </a:p>
+        </p:txBody>
+      </p:sp>
     </p:spTree>
     <p:extLst>
       <p:ext uri="{BB962C8B-B14F-4D97-AF65-F5344CB8AC3E}">
@@ -22037,47 +22088,39 @@
           </a:prstGeom>
         </p:spPr>
         <p:txBody>
-          <a:bodyPr lIns="0" tIns="0" rIns="0" bIns="0" anchor="t">
-            <a:normAutofit fontScale="88966"/>
-          </a:bodyPr>
-          <a:lstStyle/>
-          <a:p>
-            <a:pPr algn="l">
-              <a:lnSpc>
-                <a:spcPct val="110000"/>
-              </a:lnSpc>
-              <a:spcAft>
-                <a:spcPts val="0"/>
-              </a:spcAft>
-              <a:buNone/>
-              <a:defRPr sz="3600">
-                <a:solidFill>
-                  <a:srgbClr val="000000"/>
-                </a:solidFill>
-                <a:latin typeface="Arial"/>
-                <a:ea typeface="Arial"/>
-                <a:cs typeface="Arial"/>
-              </a:defRPr>
-            </a:pPr>
-            <a:r>
-              <a:rPr lang="en-US" sz="2400" b="1">
-                <a:solidFill>
-                  <a:srgbClr val="000000"/>
-                </a:solidFill>
-                <a:latin typeface="Arial" panose="020B0604020202020204" pitchFamily="34" charset="0"/>
-                <a:ea typeface="Arial"/>
-                <a:cs typeface="Arial"/>
-              </a:rPr>
-              <a:t>Machine alignment is complete; human review has not run</a:t>
-            </a:r>
-            <a:endParaRPr sz="2400" b="1">
-              <a:solidFill>
-                <a:srgbClr val="000000"/>
-              </a:solidFill>
-              <a:latin typeface="Arial" panose="020B0604020202020204" pitchFamily="34" charset="0"/>
-              <a:ea typeface="Arial"/>
-              <a:cs typeface="Arial"/>
-            </a:endParaRPr>
+          <a:bodyPr wrap="none" lIns="0" tIns="0" rIns="0" bIns="0" anchor="t">
+            <a:noAutofit/>
+          </a:bodyPr>
+          <a:lstStyle/>
+          <a:p>
+            <a:pPr algn="l">
+              <a:lnSpc>
+                <a:spcPct val="110000"/>
+              </a:lnSpc>
+              <a:spcAft>
+                <a:spcPts val="0"/>
+              </a:spcAft>
+              <a:buNone/>
+              <a:defRPr sz="2550" b="1" i="0">
+                <a:solidFill>
+                  <a:srgbClr val="000000"/>
+                </a:solidFill>
+                <a:latin typeface="Arial"/>
+                <a:ea typeface="Arial"/>
+                <a:cs typeface="Arial"/>
+              </a:defRPr>
+            </a:pPr>
+            <a:r>
+              <a:rPr sz="2550" b="1" i="0">
+                <a:solidFill>
+                  <a:srgbClr val="000000"/>
+                </a:solidFill>
+                <a:latin typeface="Arial"/>
+                <a:ea typeface="Arial"/>
+                <a:cs typeface="Arial"/>
+              </a:rPr>
+              <a:t>1,195 ASR segments exist; full-timeline and human review remain open</a:t>
+            </a:r>
           </a:p>
         </p:txBody>
       </p:sp>
@@ -22194,7 +22237,7 @@
                 <a:ea typeface="Arial"/>
                 <a:cs typeface="Arial"/>
               </a:rPr>
-              <a:t>Machine alignment provides full chronology. It does not establish translation accuracy, speaker identity, or quotation readiness.</a:t>
+              <a:t>ASR intervals cover 83.75% of the 46:26.283 media. The 932 internal gaps plus 2.333 s lead/tail require disposition; translation and speaker attribution remain unverified.</a:t>
             </a:r>
           </a:p>
         </p:txBody>
@@ -22349,7 +22392,7 @@
                 <a:ea typeface="Arial"/>
                 <a:cs typeface="Arial"/>
               </a:rPr>
-              <a:t>aligned segments</a:t>
+              <a:t>ASR segments</a:t>
             </a:r>
           </a:p>
           <a:p>
@@ -22379,7 +22422,7 @@
                 <a:ea typeface="Arial"/>
                 <a:cs typeface="Arial"/>
               </a:rPr>
-              <a:t>Hebrew ASR + machine English + transcript anchors</a:t>
+              <a:t>Hebrew ASR + machine English + timestamp anchors</a:t>
             </a:r>
           </a:p>
         </p:txBody>
@@ -22564,7 +22607,7 @@
                 <a:ea typeface="Arial"/>
                 <a:cs typeface="Arial"/>
               </a:rPr>
-              <a:t>285 segments need explicit human disposition</a:t>
+              <a:t>285 segments and all media gaps need human disposition</a:t>
             </a:r>
           </a:p>
         </p:txBody>
@@ -24606,7 +24649,7 @@
                 <a:ea typeface="Arial"/>
                 <a:cs typeface="Arial"/>
               </a:rPr>
-              <a:t>EXP-006–008, 013–016</a:t>
+              <a:t>EXP-006–008, 013, 015–016; 019–026</a:t>
             </a:r>
           </a:p>
         </p:txBody>
@@ -24666,7 +24709,7 @@
                 <a:ea typeface="Arial"/>
                 <a:cs typeface="Arial"/>
               </a:rPr>
-              <a:t>EXP-017–018, 022</a:t>
+              <a:t>EXP-009, 016–017, 022, 027, 035</a:t>
             </a:r>
           </a:p>
         </p:txBody>
@@ -24726,7 +24769,7 @@
                 <a:ea typeface="Arial"/>
                 <a:cs typeface="Arial"/>
               </a:rPr>
-              <a:t>EXP-022, 026</a:t>
+              <a:t>EXP-025–028, 036</a:t>
             </a:r>
           </a:p>
         </p:txBody>
@@ -24786,7 +24829,7 @@
                 <a:ea typeface="Arial"/>
                 <a:cs typeface="Arial"/>
               </a:rPr>
-              <a:t>EXP-025</a:t>
+              <a:t>EXP-019–020, 025–027</a:t>
             </a:r>
           </a:p>
         </p:txBody>
@@ -24846,7 +24889,7 @@
                 <a:ea typeface="Arial"/>
                 <a:cs typeface="Arial"/>
               </a:rPr>
-              <a:t>Conditional medical protocol</a:t>
+              <a:t>No active medical EXP</a:t>
             </a:r>
           </a:p>
         </p:txBody>
@@ -24906,7 +24949,7 @@
                 <a:ea typeface="Arial"/>
                 <a:cs typeface="Arial"/>
               </a:rPr>
-              <a:t>EXP-026–027</a:t>
+              <a:t>EXP-026–027, 031–032, 035–036</a:t>
             </a:r>
           </a:p>
         </p:txBody>
@@ -27973,31 +28016,27 @@
         </p:spPr>
         <p:txBody>
           <a:bodyPr wrap="square" lIns="0" tIns="0" rIns="0" bIns="0" anchor="t">
-            <a:normAutofit/>
-          </a:bodyPr>
-          <a:lstStyle/>
-          <a:p>
-            <a:pPr algn="l">
-              <a:lnSpc>
-                <a:spcPct val="110000"/>
-              </a:lnSpc>
-              <a:spcAft>
-                <a:spcPts val="600"/>
-              </a:spcAft>
-              <a:buNone/>
-              <a:defRPr sz="1650">
-                <a:solidFill>
-                  <a:srgbClr val="000000"/>
-                </a:solidFill>
-                <a:latin typeface="Arial"/>
-                <a:ea typeface="Arial"/>
-                <a:cs typeface="Arial"/>
-              </a:defRPr>
-            </a:pPr>
-            <a:r>
-              <a:rPr sz="2250" b="1">
-                <a:solidFill>
-                  <a:srgbClr val="3D8DFF"/>
+            <a:noAutofit/>
+          </a:bodyPr>
+          <a:lstStyle/>
+          <a:p>
+            <a:pPr algn="l">
+              <a:spcAft>
+                <a:spcPts val="8"/>
+              </a:spcAft>
+              <a:defRPr sz="1725" b="0" i="0">
+                <a:solidFill>
+                  <a:srgbClr val="000000"/>
+                </a:solidFill>
+                <a:latin typeface="Arial"/>
+                <a:ea typeface="Arial"/>
+                <a:cs typeface="Arial"/>
+              </a:defRPr>
+            </a:pPr>
+            <a:r>
+              <a:rPr sz="2500" b="1">
+                <a:solidFill>
+                  <a:srgbClr val="3B82F6"/>
                 </a:solidFill>
                 <a:latin typeface="Arial"/>
                 <a:ea typeface="Arial"/>
@@ -28008,62 +28047,25 @@
           </a:p>
           <a:p>
             <a:pPr algn="l">
-              <a:lnSpc>
-                <a:spcPct val="110000"/>
-              </a:lnSpc>
-              <a:spcAft>
-                <a:spcPts val="450"/>
-              </a:spcAft>
-              <a:buNone/>
-              <a:defRPr sz="1650">
-                <a:solidFill>
-                  <a:srgbClr val="000000"/>
-                </a:solidFill>
-                <a:latin typeface="Arial"/>
-                <a:ea typeface="Arial"/>
-                <a:cs typeface="Arial"/>
-              </a:defRPr>
-            </a:pPr>
-            <a:r>
-              <a:rPr sz="1650" b="0">
-                <a:solidFill>
-                  <a:srgbClr val="000000"/>
-                </a:solidFill>
-                <a:latin typeface="Arial"/>
-                <a:ea typeface="Arial"/>
-                <a:cs typeface="Arial"/>
-              </a:rPr>
-              <a:t>How can reusable human judgment be captured, governed, and reused in agentic AI assessment?</a:t>
-            </a:r>
-          </a:p>
-          <a:p>
-            <a:pPr algn="l">
-              <a:lnSpc>
-                <a:spcPct val="110000"/>
-              </a:lnSpc>
-              <a:spcAft>
-                <a:spcPts val="450"/>
-              </a:spcAft>
-              <a:buNone/>
-              <a:defRPr sz="1650">
-                <a:solidFill>
-                  <a:srgbClr val="000000"/>
-                </a:solidFill>
-                <a:latin typeface="Arial"/>
-                <a:ea typeface="Arial"/>
-                <a:cs typeface="Arial"/>
-              </a:defRPr>
-            </a:pPr>
-            <a:r>
-              <a:rPr sz="1650" b="0">
-                <a:solidFill>
-                  <a:srgbClr val="000000"/>
-                </a:solidFill>
-                <a:latin typeface="Arial"/>
-                <a:ea typeface="Arial"/>
-                <a:cs typeface="Arial"/>
-              </a:rPr>
-              <a:t>Goal: auditable, reliable, and transferable human–AI co-reasoning.</a:t>
+              <a:defRPr sz="1725" b="0" i="0">
+                <a:solidFill>
+                  <a:srgbClr val="000000"/>
+                </a:solidFill>
+                <a:latin typeface="Arial"/>
+                <a:ea typeface="Arial"/>
+                <a:cs typeface="Arial"/>
+              </a:defRPr>
+            </a:pPr>
+            <a:r>
+              <a:rPr sz="1600">
+                <a:solidFill>
+                  <a:srgbClr val="000000"/>
+                </a:solidFill>
+                <a:latin typeface="Arial"/>
+                <a:ea typeface="Arial"/>
+                <a:cs typeface="Arial"/>
+              </a:rPr>
+              <a:t>How can reusable human judgment be captured, governed, and reused in agentic AI assessment of domain-specific artifacts and processes to support auditable, reliable, and transferable human–AI co-reasoning?</a:t>
             </a:r>
           </a:p>
         </p:txBody>
@@ -28093,29 +28095,25 @@
         </p:spPr>
         <p:txBody>
           <a:bodyPr wrap="square" lIns="0" tIns="0" rIns="0" bIns="0" anchor="t">
-            <a:normAutofit/>
-          </a:bodyPr>
-          <a:lstStyle/>
-          <a:p>
-            <a:pPr algn="l">
-              <a:lnSpc>
-                <a:spcPct val="110000"/>
-              </a:lnSpc>
-              <a:spcAft>
-                <a:spcPts val="600"/>
-              </a:spcAft>
-              <a:buNone/>
-              <a:defRPr sz="1650">
-                <a:solidFill>
-                  <a:srgbClr val="000000"/>
-                </a:solidFill>
-                <a:latin typeface="Arial"/>
-                <a:ea typeface="Arial"/>
-                <a:cs typeface="Arial"/>
-              </a:defRPr>
-            </a:pPr>
-            <a:r>
-              <a:rPr sz="2250" b="1">
+            <a:noAutofit/>
+          </a:bodyPr>
+          <a:lstStyle/>
+          <a:p>
+            <a:pPr algn="l">
+              <a:spcAft>
+                <a:spcPts val="5"/>
+              </a:spcAft>
+              <a:defRPr sz="1575" b="0" i="0">
+                <a:solidFill>
+                  <a:srgbClr val="000000"/>
+                </a:solidFill>
+                <a:latin typeface="Arial"/>
+                <a:ea typeface="Arial"/>
+                <a:cs typeface="Arial"/>
+              </a:defRPr>
+            </a:pPr>
+            <a:r>
+              <a:rPr sz="2500" b="1">
                 <a:solidFill>
                   <a:srgbClr val="000000"/>
                 </a:solidFill>
@@ -28128,92 +28126,77 @@
           </a:p>
           <a:p>
             <a:pPr algn="l">
-              <a:lnSpc>
-                <a:spcPct val="110000"/>
-              </a:lnSpc>
-              <a:spcAft>
-                <a:spcPts val="450"/>
-              </a:spcAft>
-              <a:buNone/>
-              <a:defRPr sz="1650">
-                <a:solidFill>
-                  <a:srgbClr val="000000"/>
-                </a:solidFill>
-                <a:latin typeface="Arial"/>
-                <a:ea typeface="Arial"/>
-                <a:cs typeface="Arial"/>
-              </a:defRPr>
-            </a:pPr>
-            <a:r>
-              <a:rPr sz="1650" b="0">
-                <a:solidFill>
-                  <a:srgbClr val="000000"/>
-                </a:solidFill>
-                <a:latin typeface="Arial"/>
-                <a:ea typeface="Arial"/>
-                <a:cs typeface="Arial"/>
-              </a:rPr>
-              <a:t>SQ1 · When should the system request human judgment?</a:t>
-            </a:r>
-          </a:p>
-          <a:p>
-            <a:pPr algn="l">
-              <a:lnSpc>
-                <a:spcPct val="110000"/>
-              </a:lnSpc>
-              <a:spcAft>
-                <a:spcPts val="450"/>
-              </a:spcAft>
-              <a:buNone/>
-              <a:defRPr sz="1650">
-                <a:solidFill>
-                  <a:srgbClr val="000000"/>
-                </a:solidFill>
-                <a:latin typeface="Arial"/>
-                <a:ea typeface="Arial"/>
-                <a:cs typeface="Arial"/>
-              </a:defRPr>
-            </a:pPr>
-            <a:r>
-              <a:rPr sz="1650" b="0">
-                <a:solidFill>
-                  <a:srgbClr val="000000"/>
-                </a:solidFill>
-                <a:latin typeface="Arial"/>
-                <a:ea typeface="Arial"/>
-                <a:cs typeface="Arial"/>
-              </a:rPr>
-              <a:t>SQ2 · How should judgment be governed and safely reused?</a:t>
-            </a:r>
-          </a:p>
-          <a:p>
-            <a:pPr algn="l">
-              <a:lnSpc>
-                <a:spcPct val="110000"/>
-              </a:lnSpc>
-              <a:spcAft>
-                <a:spcPts val="450"/>
-              </a:spcAft>
-              <a:buNone/>
-              <a:defRPr sz="1650">
-                <a:solidFill>
-                  <a:srgbClr val="000000"/>
-                </a:solidFill>
-                <a:latin typeface="Arial"/>
-                <a:ea typeface="Arial"/>
-                <a:cs typeface="Arial"/>
-              </a:defRPr>
-            </a:pPr>
-            <a:r>
-              <a:rPr sz="1650" b="0">
-                <a:solidFill>
-                  <a:srgbClr val="000000"/>
-                </a:solidFill>
-                <a:latin typeface="Arial"/>
-                <a:ea typeface="Arial"/>
-                <a:cs typeface="Arial"/>
-              </a:rPr>
-              <a:t>SQ3 · What quality, traceability, effort, and transfer effects result?</a:t>
+              <a:spcAft>
+                <a:spcPts val="5"/>
+              </a:spcAft>
+              <a:defRPr sz="1575" b="0" i="0">
+                <a:solidFill>
+                  <a:srgbClr val="000000"/>
+                </a:solidFill>
+                <a:latin typeface="Arial"/>
+                <a:ea typeface="Arial"/>
+                <a:cs typeface="Arial"/>
+              </a:defRPr>
+            </a:pPr>
+            <a:r>
+              <a:rPr sz="1550">
+                <a:solidFill>
+                  <a:srgbClr val="000000"/>
+                </a:solidFill>
+                <a:latin typeface="Arial"/>
+                <a:ea typeface="Arial"/>
+                <a:cs typeface="Arial"/>
+              </a:rPr>
+              <a:t>SQ1 · When and how should an agentic assessment system request human judgment so that important uncertainties are addressed without unnecessary expert burden?</a:t>
+            </a:r>
+          </a:p>
+          <a:p>
+            <a:pPr algn="l">
+              <a:spcAft>
+                <a:spcPts val="5"/>
+              </a:spcAft>
+              <a:defRPr sz="1575" b="0" i="0">
+                <a:solidFill>
+                  <a:srgbClr val="000000"/>
+                </a:solidFill>
+                <a:latin typeface="Arial"/>
+                <a:ea typeface="Arial"/>
+                <a:cs typeface="Arial"/>
+              </a:defRPr>
+            </a:pPr>
+            <a:r>
+              <a:rPr sz="1550">
+                <a:solidFill>
+                  <a:srgbClr val="000000"/>
+                </a:solidFill>
+                <a:latin typeface="Arial"/>
+                <a:ea typeface="Arial"/>
+                <a:cs typeface="Arial"/>
+              </a:rPr>
+              <a:t>SQ2 · How should expert judgments be represented, validated, reconciled, and stored so they can be reused transparently without unsafe generalization or loss of human authority?</a:t>
+            </a:r>
+          </a:p>
+          <a:p>
+            <a:pPr algn="l">
+              <a:defRPr sz="1575" b="0" i="0">
+                <a:solidFill>
+                  <a:srgbClr val="000000"/>
+                </a:solidFill>
+                <a:latin typeface="Arial"/>
+                <a:ea typeface="Arial"/>
+                <a:cs typeface="Arial"/>
+              </a:defRPr>
+            </a:pPr>
+            <a:r>
+              <a:rPr sz="1550">
+                <a:solidFill>
+                  <a:srgbClr val="000000"/>
+                </a:solidFill>
+                <a:latin typeface="Arial"/>
+                <a:ea typeface="Arial"/>
+                <a:cs typeface="Arial"/>
+              </a:rPr>
+              <a:t>SQ3 · To what extent does the resulting framework improve assessment quality, consistency, traceability, and expert effort across domains, first in software/modeling and, when governance and access permit, in healthcare?</a:t>
             </a:r>
           </a:p>
         </p:txBody>
@@ -29601,29 +29584,22 @@
         </p:spPr>
         <p:txBody>
           <a:bodyPr wrap="square" lIns="0" tIns="0" rIns="0" bIns="0" anchor="t">
-            <a:normAutofit/>
-          </a:bodyPr>
-          <a:lstStyle/>
-          <a:p>
-            <a:pPr algn="l">
-              <a:lnSpc>
-                <a:spcPct val="110000"/>
-              </a:lnSpc>
-              <a:spcAft>
-                <a:spcPts val="600"/>
-              </a:spcAft>
-              <a:buNone/>
-              <a:defRPr sz="1650">
-                <a:solidFill>
-                  <a:srgbClr val="000000"/>
-                </a:solidFill>
-                <a:latin typeface="Arial"/>
-                <a:ea typeface="Arial"/>
-                <a:cs typeface="Arial"/>
-              </a:defRPr>
-            </a:pPr>
-            <a:r>
-              <a:rPr sz="2250" b="1">
+            <a:noAutofit/>
+          </a:bodyPr>
+          <a:lstStyle/>
+          <a:p>
+            <a:pPr algn="l">
+              <a:defRPr sz="1575" b="0" i="0">
+                <a:solidFill>
+                  <a:srgbClr val="000000"/>
+                </a:solidFill>
+                <a:latin typeface="Arial"/>
+                <a:ea typeface="Arial"/>
+                <a:cs typeface="Arial"/>
+              </a:defRPr>
+            </a:pPr>
+            <a:r>
+              <a:rPr sz="2400" b="1">
                 <a:solidFill>
                   <a:srgbClr val="000000"/>
                 </a:solidFill>
@@ -29636,84 +29612,63 @@
           </a:p>
           <a:p>
             <a:pPr algn="l">
-              <a:lnSpc>
-                <a:spcPct val="110000"/>
-              </a:lnSpc>
-              <a:spcAft>
-                <a:spcPts val="450"/>
-              </a:spcAft>
-              <a:buNone/>
-              <a:defRPr sz="1650">
-                <a:solidFill>
-                  <a:srgbClr val="000000"/>
-                </a:solidFill>
-                <a:latin typeface="Arial"/>
-                <a:ea typeface="Arial"/>
-                <a:cs typeface="Arial"/>
-              </a:defRPr>
-            </a:pPr>
-            <a:r>
-              <a:rPr sz="1650" b="0">
-                <a:solidFill>
-                  <a:srgbClr val="000000"/>
-                </a:solidFill>
-                <a:latin typeface="Arial"/>
-                <a:ea typeface="Arial"/>
-                <a:cs typeface="Arial"/>
-              </a:rPr>
-              <a:t>Add a bounded medical transfer only after G1–G6 pass.</a:t>
-            </a:r>
-          </a:p>
-          <a:p>
-            <a:pPr algn="l">
-              <a:lnSpc>
-                <a:spcPct val="110000"/>
-              </a:lnSpc>
-              <a:spcAft>
-                <a:spcPts val="450"/>
-              </a:spcAft>
-              <a:buNone/>
-              <a:defRPr sz="1650">
-                <a:solidFill>
-                  <a:srgbClr val="000000"/>
-                </a:solidFill>
-                <a:latin typeface="Arial"/>
-                <a:ea typeface="Arial"/>
-                <a:cs typeface="Arial"/>
-              </a:defRPr>
-            </a:pPr>
-            <a:r>
-              <a:rPr sz="1650" b="0">
-                <a:solidFill>
-                  <a:srgbClr val="000000"/>
-                </a:solidFill>
-                <a:latin typeface="Arial"/>
-                <a:ea typeface="Arial"/>
-                <a:cs typeface="Arial"/>
-              </a:rPr>
-              <a:t>If any critical gate is not evidenced by 26 August, Plan B becomes the September baseline.</a:t>
-            </a:r>
-          </a:p>
-          <a:p>
-            <a:pPr algn="l">
-              <a:lnSpc>
-                <a:spcPct val="110000"/>
-              </a:lnSpc>
-              <a:spcAft>
-                <a:spcPts val="450"/>
-              </a:spcAft>
-              <a:buNone/>
-              <a:defRPr sz="1650">
-                <a:solidFill>
-                  <a:srgbClr val="000000"/>
-                </a:solidFill>
-                <a:latin typeface="Arial"/>
-                <a:ea typeface="Arial"/>
-                <a:cs typeface="Arial"/>
-              </a:defRPr>
-            </a:pPr>
-            <a:r>
-              <a:rPr sz="1650" b="0">
+              <a:defRPr sz="1575" b="0" i="0">
+                <a:solidFill>
+                  <a:srgbClr val="000000"/>
+                </a:solidFill>
+                <a:latin typeface="Arial"/>
+                <a:ea typeface="Arial"/>
+                <a:cs typeface="Arial"/>
+              </a:defRPr>
+            </a:pPr>
+            <a:r>
+              <a:rPr sz="1800">
+                <a:solidFill>
+                  <a:srgbClr val="000000"/>
+                </a:solidFill>
+                <a:latin typeface="Arial"/>
+                <a:ea typeface="Arial"/>
+                <a:cs typeface="Arial"/>
+              </a:rPr>
+              <a:t>Add a bounded medical transfer only after G1–G6 actually pass.</a:t>
+            </a:r>
+          </a:p>
+          <a:p>
+            <a:pPr algn="l">
+              <a:defRPr sz="1575" b="0" i="0">
+                <a:solidFill>
+                  <a:srgbClr val="000000"/>
+                </a:solidFill>
+                <a:latin typeface="Arial"/>
+                <a:ea typeface="Arial"/>
+                <a:cs typeface="Arial"/>
+              </a:defRPr>
+            </a:pPr>
+            <a:r>
+              <a:rPr sz="1800">
+                <a:solidFill>
+                  <a:srgbClr val="000000"/>
+                </a:solidFill>
+                <a:latin typeface="Arial"/>
+                <a:ea typeface="Arial"/>
+                <a:cs typeface="Arial"/>
+              </a:rPr>
+              <a:t>Checkpoint: if any gate lacks an owner, evidence path, or feasible date on 26 August, Plan B becomes the September baseline.</a:t>
+            </a:r>
+          </a:p>
+          <a:p>
+            <a:pPr algn="l">
+              <a:defRPr sz="1575" b="0" i="0">
+                <a:solidFill>
+                  <a:srgbClr val="000000"/>
+                </a:solidFill>
+                <a:latin typeface="Arial"/>
+                <a:ea typeface="Arial"/>
+                <a:cs typeface="Arial"/>
+              </a:defRPr>
+            </a:pPr>
+            <a:r>
+              <a:rPr sz="1700">
                 <a:solidFill>
                   <a:srgbClr val="000000"/>
                 </a:solidFill>
@@ -31476,7 +31431,7 @@
                     <a:lstStyle/>
                     <a:p>
                       <a:r>
-                        <a:t>Cohort/outcome/mapping/leakage/statistics</a:t>
+                        <a:t>Cohort/outcome/mapping/leakage/stats</a:t>
                       </a:r>
                     </a:p>
                   </a:txBody>
